--- a/media/resources/files/BaardykAmaldarKatanyTap.pptx
+++ b/media/resources/files/BaardykAmaldarKatanyTap.pptx
@@ -5135,7 +5135,7 @@
             </a:pPr>
             <a:r>
               <a:rPr lang="ru-RU" sz="2800" dirty="0"/>
-              <a:t>Турдуу пикирлер учун ыраазычылык билдиребиз.</a:t>
+              <a:t>Түрдүү пикирлер үчүн ыраазычылык билдиребиз.</a:t>
             </a:r>
           </a:p>
           <a:p>

--- a/media/resources/files/BaardykAmaldarKatanyTap.pptx
+++ b/media/resources/files/BaardykAmaldarKatanyTap.pptx
@@ -3666,7 +3666,7 @@
           <a:p>
             <a:r>
               <a:rPr lang="ru-RU" dirty="0"/>
-              <a:t>Баардык амалдарды аткаруу тартиби</a:t>
+              <a:t>Бардык амалдарды аткаруу тартиби</a:t>
             </a:r>
             <a:r>
               <a:rPr lang="en-US" dirty="0"/>
